--- a/ClassReview/第七组-课堂回顾.pptx
+++ b/ClassReview/第七组-课堂回顾.pptx
@@ -123,7 +123,7 @@
   <p:extLst>
     <p:ext uri="{EFAFB233-063F-42B5-8137-9DF3F51BA10A}">
       <p15:sldGuideLst xmlns:p15="http://schemas.microsoft.com/office/powerpoint/2012/main">
-        <p15:guide id="1" orient="horz" pos="2246" userDrawn="1">
+        <p15:guide id="1" orient="horz" pos="2248" userDrawn="1">
           <p15:clr>
             <a:srgbClr val="A4A3A4"/>
           </p15:clr>
@@ -9253,10 +9253,10 @@
         </p:nvGrpSpPr>
         <p:grpSpPr>
           <a:xfrm>
-            <a:off x="679450" y="1031875"/>
-            <a:ext cx="9499600" cy="1407795"/>
-            <a:chOff x="670560" y="1905000"/>
-            <a:chExt cx="9499600" cy="1407795"/>
+            <a:off x="679450" y="1044575"/>
+            <a:ext cx="9499600" cy="1494155"/>
+            <a:chOff x="670560" y="1818640"/>
+            <a:chExt cx="9499600" cy="1494155"/>
           </a:xfrm>
         </p:grpSpPr>
         <p:sp>
@@ -9267,7 +9267,7 @@
           </p:nvSpPr>
           <p:spPr>
             <a:xfrm>
-              <a:off x="680847" y="1905000"/>
+              <a:off x="670687" y="1818640"/>
               <a:ext cx="3086100" cy="184150"/>
             </a:xfrm>
             <a:prstGeom prst="rect">
@@ -9412,8 +9412,8 @@
         </p:nvGrpSpPr>
         <p:grpSpPr>
           <a:xfrm>
-            <a:off x="685800" y="2800985"/>
-            <a:ext cx="2667000" cy="38100"/>
+            <a:off x="689610" y="3121025"/>
+            <a:ext cx="10727690" cy="76200"/>
             <a:chOff x="685800" y="3505200"/>
             <a:chExt cx="2667000" cy="38100"/>
           </a:xfrm>
@@ -9439,613 +9439,10 @@
               <a:noFill/>
             </a:ln>
           </p:spPr>
-        </p:sp>
-      </p:grpSp>
-      <p:grpSp>
-        <p:nvGrpSpPr>
-          <p:cNvPr id="12" name="quiz-1"/>
-          <p:cNvGrpSpPr/>
-          <p:nvPr>
-            <p:custDataLst>
-              <p:tags r:id="rId1"/>
-            </p:custDataLst>
-          </p:nvPr>
-        </p:nvGrpSpPr>
-        <p:grpSpPr>
-          <a:xfrm>
-            <a:off x="685800" y="3105785"/>
-            <a:ext cx="3238500" cy="1428750"/>
-            <a:chOff x="685800" y="3810000"/>
-            <a:chExt cx="3238500" cy="1428750"/>
-          </a:xfrm>
-        </p:grpSpPr>
-        <p:sp>
-          <p:nvSpPr>
-            <p:cNvPr id="8" name="Rectangle 8"/>
-            <p:cNvSpPr/>
-            <p:nvPr>
-              <p:custDataLst>
-                <p:tags r:id="rId2"/>
-              </p:custDataLst>
-            </p:nvPr>
-          </p:nvSpPr>
-          <p:spPr>
-            <a:xfrm>
-              <a:off x="685800" y="3810000"/>
-              <a:ext cx="3238500" cy="1428750"/>
-            </a:xfrm>
-            <a:prstGeom prst="rect">
-              <a:avLst/>
-            </a:prstGeom>
-            <a:solidFill>
-              <a:srgbClr val="16283C"/>
-            </a:solidFill>
-            <a:ln w="9525">
-              <a:solidFill>
-                <a:srgbClr val="2A4055"/>
-              </a:solidFill>
-            </a:ln>
-          </p:spPr>
-        </p:sp>
-        <p:sp>
-          <p:nvSpPr>
-            <p:cNvPr id="9" name="TextBox 9"/>
-            <p:cNvSpPr txBox="1"/>
-            <p:nvPr>
-              <p:custDataLst>
-                <p:tags r:id="rId3"/>
-              </p:custDataLst>
-            </p:nvPr>
-          </p:nvSpPr>
-          <p:spPr>
-            <a:xfrm>
-              <a:off x="909638" y="4013200"/>
-              <a:ext cx="843478" cy="161925"/>
-            </a:xfrm>
-            <a:prstGeom prst="rect">
-              <a:avLst/>
-            </a:prstGeom>
-            <a:noFill/>
-            <a:ln>
-              <a:noFill/>
-            </a:ln>
-          </p:spPr>
-          <p:txBody>
-            <a:bodyPr wrap="none" lIns="0" tIns="0" rIns="0" bIns="0" anchor="t" anchorCtr="0">
-              <a:spAutoFit/>
-            </a:bodyPr>
-            <a:lstStyle/>
-            <a:p>
-              <a:pPr algn="l"/>
-              <a:r>
-                <a:rPr lang="en-US" sz="820" dirty="0">
-                  <a:solidFill>
-                    <a:srgbClr val="C9A227"/>
-                  </a:solidFill>
-                  <a:latin typeface="+mj-lt"/>
-                  <a:ea typeface="+mj-ea"/>
-                  <a:cs typeface="+mj-cs"/>
-                </a:rPr>
-                <a:t>SELF-CHECK 01</a:t>
-              </a:r>
-              <a:endParaRPr lang="en-US" sz="820" dirty="0">
-                <a:solidFill>
-                  <a:srgbClr val="C9A227"/>
-                </a:solidFill>
-                <a:latin typeface="+mj-lt"/>
-                <a:ea typeface="+mj-ea"/>
-                <a:cs typeface="+mj-cs"/>
-              </a:endParaRPr>
-            </a:p>
-          </p:txBody>
-        </p:sp>
-        <p:sp>
-          <p:nvSpPr>
-            <p:cNvPr id="10" name="TextBox 10"/>
-            <p:cNvSpPr txBox="1"/>
-            <p:nvPr>
-              <p:custDataLst>
-                <p:tags r:id="rId4"/>
-              </p:custDataLst>
-            </p:nvPr>
-          </p:nvSpPr>
-          <p:spPr>
-            <a:xfrm>
-              <a:off x="908304" y="4324350"/>
-              <a:ext cx="1737078" cy="234696"/>
-            </a:xfrm>
-            <a:prstGeom prst="rect">
-              <a:avLst/>
-            </a:prstGeom>
-            <a:noFill/>
-            <a:ln>
-              <a:noFill/>
-            </a:ln>
-          </p:spPr>
-          <p:txBody>
-            <a:bodyPr wrap="none" lIns="0" tIns="0" rIns="0" bIns="0" anchor="t" anchorCtr="0">
-              <a:spAutoFit/>
-            </a:bodyPr>
-            <a:lstStyle/>
-            <a:p>
-              <a:pPr algn="l"/>
-              <a:r>
-                <a:rPr lang="zh-CN" sz="1200" b="1" dirty="0">
-                  <a:solidFill>
-                    <a:srgbClr val="FFFFFF"/>
-                  </a:solidFill>
-                  <a:latin typeface="+mn-lt"/>
-                  <a:ea typeface="+mn-ea"/>
-                  <a:cs typeface="+mn-cs"/>
-                </a:rPr>
-                <a:t>信号量 = -3 是什么意思</a:t>
-              </a:r>
-              <a:endParaRPr lang="zh-CN" sz="1200" b="1" dirty="0">
-                <a:solidFill>
-                  <a:srgbClr val="FFFFFF"/>
-                </a:solidFill>
-                <a:latin typeface="+mn-lt"/>
-                <a:ea typeface="+mn-ea"/>
-                <a:cs typeface="+mn-cs"/>
-              </a:endParaRPr>
-            </a:p>
-          </p:txBody>
-        </p:sp>
-        <p:sp>
-          <p:nvSpPr>
-            <p:cNvPr id="11" name="TextBox 11"/>
-            <p:cNvSpPr txBox="1"/>
-            <p:nvPr>
-              <p:custDataLst>
-                <p:tags r:id="rId5"/>
-              </p:custDataLst>
-            </p:nvPr>
-          </p:nvSpPr>
-          <p:spPr>
-            <a:xfrm>
-              <a:off x="909447" y="4686300"/>
-              <a:ext cx="1612826" cy="191643"/>
-            </a:xfrm>
-            <a:prstGeom prst="rect">
-              <a:avLst/>
-            </a:prstGeom>
-            <a:noFill/>
-            <a:ln>
-              <a:noFill/>
-            </a:ln>
-          </p:spPr>
-          <p:txBody>
-            <a:bodyPr wrap="none" lIns="0" tIns="0" rIns="0" bIns="0" anchor="t" anchorCtr="0">
-              <a:spAutoFit/>
-            </a:bodyPr>
-            <a:lstStyle/>
-            <a:p>
-              <a:pPr algn="l"/>
-              <a:r>
-                <a:rPr lang="zh-CN" sz="980" dirty="0">
-                  <a:solidFill>
-                    <a:srgbClr val="A9B7CC"/>
-                  </a:solidFill>
-                  <a:latin typeface="+mn-lt"/>
-                  <a:ea typeface="+mn-ea"/>
-                  <a:cs typeface="+mn-cs"/>
-                </a:rPr>
-                <a:t>有 3 个进程在等这个资源。</a:t>
-              </a:r>
-              <a:endParaRPr lang="zh-CN" sz="980" dirty="0">
-                <a:solidFill>
-                  <a:srgbClr val="A9B7CC"/>
-                </a:solidFill>
-                <a:latin typeface="+mn-lt"/>
-                <a:ea typeface="+mn-ea"/>
-                <a:cs typeface="+mn-cs"/>
-              </a:endParaRPr>
-            </a:p>
-          </p:txBody>
-        </p:sp>
-      </p:grpSp>
-      <p:grpSp>
-        <p:nvGrpSpPr>
-          <p:cNvPr id="17" name="quiz-2"/>
-          <p:cNvGrpSpPr/>
-          <p:nvPr>
-            <p:custDataLst>
-              <p:tags r:id="rId6"/>
-            </p:custDataLst>
-          </p:nvPr>
-        </p:nvGrpSpPr>
-        <p:grpSpPr>
-          <a:xfrm>
-            <a:off x="4152900" y="3105785"/>
-            <a:ext cx="3238500" cy="1428750"/>
-            <a:chOff x="4152900" y="3810000"/>
-            <a:chExt cx="3238500" cy="1428750"/>
-          </a:xfrm>
-        </p:grpSpPr>
-        <p:sp>
-          <p:nvSpPr>
-            <p:cNvPr id="13" name="Rectangle 13"/>
-            <p:cNvSpPr/>
-            <p:nvPr>
-              <p:custDataLst>
-                <p:tags r:id="rId7"/>
-              </p:custDataLst>
-            </p:nvPr>
-          </p:nvSpPr>
-          <p:spPr>
-            <a:xfrm>
-              <a:off x="4152900" y="3810000"/>
-              <a:ext cx="3238500" cy="1428750"/>
-            </a:xfrm>
-            <a:prstGeom prst="rect">
-              <a:avLst/>
-            </a:prstGeom>
-            <a:solidFill>
-              <a:srgbClr val="16283C"/>
-            </a:solidFill>
-            <a:ln w="9525">
-              <a:solidFill>
-                <a:srgbClr val="2A4055"/>
-              </a:solidFill>
-            </a:ln>
-          </p:spPr>
-        </p:sp>
-        <p:sp>
-          <p:nvSpPr>
-            <p:cNvPr id="14" name="TextBox 14"/>
-            <p:cNvSpPr txBox="1"/>
-            <p:nvPr>
-              <p:custDataLst>
-                <p:tags r:id="rId8"/>
-              </p:custDataLst>
-            </p:nvPr>
-          </p:nvSpPr>
-          <p:spPr>
-            <a:xfrm>
-              <a:off x="4376738" y="4013200"/>
-              <a:ext cx="843478" cy="161925"/>
-            </a:xfrm>
-            <a:prstGeom prst="rect">
-              <a:avLst/>
-            </a:prstGeom>
-            <a:noFill/>
-            <a:ln>
-              <a:noFill/>
-            </a:ln>
-          </p:spPr>
-          <p:txBody>
-            <a:bodyPr wrap="none" lIns="0" tIns="0" rIns="0" bIns="0" anchor="t" anchorCtr="0">
-              <a:spAutoFit/>
-            </a:bodyPr>
-            <a:lstStyle/>
-            <a:p>
-              <a:pPr algn="l"/>
-              <a:r>
-                <a:rPr lang="en-US" sz="820" dirty="0">
-                  <a:solidFill>
-                    <a:srgbClr val="C9A227"/>
-                  </a:solidFill>
-                  <a:latin typeface="+mj-lt"/>
-                  <a:ea typeface="+mj-ea"/>
-                  <a:cs typeface="+mj-cs"/>
-                </a:rPr>
-                <a:t>SELF-CHECK 02</a:t>
-              </a:r>
-              <a:endParaRPr lang="en-US" sz="820" dirty="0">
-                <a:solidFill>
-                  <a:srgbClr val="C9A227"/>
-                </a:solidFill>
-                <a:latin typeface="+mj-lt"/>
-                <a:ea typeface="+mj-ea"/>
-                <a:cs typeface="+mj-cs"/>
-              </a:endParaRPr>
-            </a:p>
-          </p:txBody>
-        </p:sp>
-        <p:sp>
-          <p:nvSpPr>
-            <p:cNvPr id="15" name="TextBox 15"/>
-            <p:cNvSpPr txBox="1"/>
-            <p:nvPr>
-              <p:custDataLst>
-                <p:tags r:id="rId9"/>
-              </p:custDataLst>
-            </p:nvPr>
-          </p:nvSpPr>
-          <p:spPr>
-            <a:xfrm>
-              <a:off x="4375404" y="4324350"/>
-              <a:ext cx="1771002" cy="234696"/>
-            </a:xfrm>
-            <a:prstGeom prst="rect">
-              <a:avLst/>
-            </a:prstGeom>
-            <a:noFill/>
-            <a:ln>
-              <a:noFill/>
-            </a:ln>
-          </p:spPr>
-          <p:txBody>
-            <a:bodyPr wrap="none" lIns="0" tIns="0" rIns="0" bIns="0" anchor="t" anchorCtr="0">
-              <a:spAutoFit/>
-            </a:bodyPr>
-            <a:lstStyle/>
-            <a:p>
-              <a:pPr algn="l"/>
-              <a:r>
-                <a:rPr lang="zh-CN" sz="1200" b="1" dirty="0">
-                  <a:solidFill>
-                    <a:srgbClr val="FFFFFF"/>
-                  </a:solidFill>
-                  <a:latin typeface="+mn-lt"/>
-                  <a:ea typeface="+mn-ea"/>
-                  <a:cs typeface="+mn-cs"/>
-                </a:rPr>
-                <a:t>两个 wait 能交换顺序吗</a:t>
-              </a:r>
-              <a:endParaRPr lang="zh-CN" sz="1200" b="1" dirty="0">
-                <a:solidFill>
-                  <a:srgbClr val="FFFFFF"/>
-                </a:solidFill>
-                <a:latin typeface="+mn-lt"/>
-                <a:ea typeface="+mn-ea"/>
-                <a:cs typeface="+mn-cs"/>
-              </a:endParaRPr>
-            </a:p>
-          </p:txBody>
-        </p:sp>
-        <p:sp>
-          <p:nvSpPr>
-            <p:cNvPr id="16" name="TextBox 16"/>
-            <p:cNvSpPr txBox="1"/>
-            <p:nvPr>
-              <p:custDataLst>
-                <p:tags r:id="rId10"/>
-              </p:custDataLst>
-            </p:nvPr>
-          </p:nvSpPr>
-          <p:spPr>
-            <a:xfrm>
-              <a:off x="4376547" y="4686300"/>
-              <a:ext cx="1593037" cy="191643"/>
-            </a:xfrm>
-            <a:prstGeom prst="rect">
-              <a:avLst/>
-            </a:prstGeom>
-            <a:noFill/>
-            <a:ln>
-              <a:noFill/>
-            </a:ln>
-          </p:spPr>
-          <p:txBody>
-            <a:bodyPr wrap="none" lIns="0" tIns="0" rIns="0" bIns="0" anchor="t" anchorCtr="0">
-              <a:spAutoFit/>
-            </a:bodyPr>
-            <a:lstStyle/>
-            <a:p>
-              <a:pPr algn="l"/>
-              <a:r>
-                <a:rPr lang="zh-CN" sz="980" dirty="0">
-                  <a:solidFill>
-                    <a:srgbClr val="A9B7CC"/>
-                  </a:solidFill>
-                  <a:latin typeface="+mn-lt"/>
-                  <a:ea typeface="+mn-ea"/>
-                  <a:cs typeface="+mn-cs"/>
-                </a:rPr>
-                <a:t>不能。缓冲区满时会死锁。</a:t>
-              </a:r>
-              <a:endParaRPr lang="zh-CN" sz="980" dirty="0">
-                <a:solidFill>
-                  <a:srgbClr val="A9B7CC"/>
-                </a:solidFill>
-                <a:latin typeface="+mn-lt"/>
-                <a:ea typeface="+mn-ea"/>
-                <a:cs typeface="+mn-cs"/>
-              </a:endParaRPr>
-            </a:p>
-          </p:txBody>
-        </p:sp>
-      </p:grpSp>
-      <p:grpSp>
-        <p:nvGrpSpPr>
-          <p:cNvPr id="22" name="quiz-3"/>
-          <p:cNvGrpSpPr/>
-          <p:nvPr>
-            <p:custDataLst>
-              <p:tags r:id="rId11"/>
-            </p:custDataLst>
-          </p:nvPr>
-        </p:nvGrpSpPr>
-        <p:grpSpPr>
-          <a:xfrm>
-            <a:off x="7620000" y="3105785"/>
-            <a:ext cx="3238500" cy="1428750"/>
-            <a:chOff x="7620000" y="3810000"/>
-            <a:chExt cx="3238500" cy="1428750"/>
-          </a:xfrm>
-        </p:grpSpPr>
-        <p:sp>
-          <p:nvSpPr>
-            <p:cNvPr id="18" name="Rectangle 18"/>
-            <p:cNvSpPr/>
-            <p:nvPr>
-              <p:custDataLst>
-                <p:tags r:id="rId12"/>
-              </p:custDataLst>
-            </p:nvPr>
-          </p:nvSpPr>
-          <p:spPr>
-            <a:xfrm>
-              <a:off x="7620000" y="3810000"/>
-              <a:ext cx="3238500" cy="1428750"/>
-            </a:xfrm>
-            <a:prstGeom prst="rect">
-              <a:avLst/>
-            </a:prstGeom>
-            <a:solidFill>
-              <a:srgbClr val="16283C"/>
-            </a:solidFill>
-            <a:ln w="9525">
-              <a:solidFill>
-                <a:srgbClr val="2A4055"/>
-              </a:solidFill>
-            </a:ln>
-          </p:spPr>
-        </p:sp>
-        <p:sp>
-          <p:nvSpPr>
-            <p:cNvPr id="19" name="TextBox 19"/>
-            <p:cNvSpPr txBox="1"/>
-            <p:nvPr>
-              <p:custDataLst>
-                <p:tags r:id="rId13"/>
-              </p:custDataLst>
-            </p:nvPr>
-          </p:nvSpPr>
-          <p:spPr>
-            <a:xfrm>
-              <a:off x="7843838" y="4013200"/>
-              <a:ext cx="843478" cy="161925"/>
-            </a:xfrm>
-            <a:prstGeom prst="rect">
-              <a:avLst/>
-            </a:prstGeom>
-            <a:noFill/>
-            <a:ln>
-              <a:noFill/>
-            </a:ln>
-          </p:spPr>
-          <p:txBody>
-            <a:bodyPr wrap="none" lIns="0" tIns="0" rIns="0" bIns="0" anchor="t" anchorCtr="0">
-              <a:spAutoFit/>
-            </a:bodyPr>
-            <a:lstStyle/>
-            <a:p>
-              <a:pPr algn="l"/>
-              <a:r>
-                <a:rPr lang="en-US" sz="820" dirty="0">
-                  <a:solidFill>
-                    <a:srgbClr val="C9A227"/>
-                  </a:solidFill>
-                  <a:latin typeface="+mj-lt"/>
-                  <a:ea typeface="+mj-ea"/>
-                  <a:cs typeface="+mj-cs"/>
-                </a:rPr>
-                <a:t>SELF-CHECK 03</a:t>
-              </a:r>
-              <a:endParaRPr lang="en-US" sz="820" dirty="0">
-                <a:solidFill>
-                  <a:srgbClr val="C9A227"/>
-                </a:solidFill>
-                <a:latin typeface="+mj-lt"/>
-                <a:ea typeface="+mj-ea"/>
-                <a:cs typeface="+mj-cs"/>
-              </a:endParaRPr>
-            </a:p>
-          </p:txBody>
-        </p:sp>
-        <p:sp>
-          <p:nvSpPr>
-            <p:cNvPr id="20" name="TextBox 20"/>
-            <p:cNvSpPr txBox="1"/>
-            <p:nvPr>
-              <p:custDataLst>
-                <p:tags r:id="rId14"/>
-              </p:custDataLst>
-            </p:nvPr>
-          </p:nvSpPr>
-          <p:spPr>
-            <a:xfrm>
-              <a:off x="7842504" y="4324350"/>
-              <a:ext cx="1627632" cy="234696"/>
-            </a:xfrm>
-            <a:prstGeom prst="rect">
-              <a:avLst/>
-            </a:prstGeom>
-            <a:noFill/>
-            <a:ln>
-              <a:noFill/>
-            </a:ln>
-          </p:spPr>
-          <p:txBody>
-            <a:bodyPr wrap="none" lIns="0" tIns="0" rIns="0" bIns="0" anchor="t" anchorCtr="0">
-              <a:spAutoFit/>
-            </a:bodyPr>
-            <a:lstStyle/>
-            <a:p>
-              <a:pPr algn="l"/>
-              <a:r>
-                <a:rPr lang="zh-CN" sz="1200" b="1" dirty="0">
-                  <a:solidFill>
-                    <a:srgbClr val="FFFFFF"/>
-                  </a:solidFill>
-                  <a:latin typeface="+mn-lt"/>
-                  <a:ea typeface="+mn-ea"/>
-                  <a:cs typeface="+mn-cs"/>
-                </a:rPr>
-                <a:t>哲学家问题还能怎么改</a:t>
-              </a:r>
-              <a:endParaRPr lang="zh-CN" sz="1200" b="1" dirty="0">
-                <a:solidFill>
-                  <a:srgbClr val="FFFFFF"/>
-                </a:solidFill>
-                <a:latin typeface="+mn-lt"/>
-                <a:ea typeface="+mn-ea"/>
-                <a:cs typeface="+mn-cs"/>
-              </a:endParaRPr>
-            </a:p>
-          </p:txBody>
-        </p:sp>
-        <p:sp>
-          <p:nvSpPr>
-            <p:cNvPr id="21" name="TextBox 21"/>
-            <p:cNvSpPr txBox="1"/>
-            <p:nvPr>
-              <p:custDataLst>
-                <p:tags r:id="rId15"/>
-              </p:custDataLst>
-            </p:nvPr>
-          </p:nvSpPr>
-          <p:spPr>
-            <a:xfrm>
-              <a:off x="7843647" y="4686300"/>
-              <a:ext cx="2120748" cy="191643"/>
-            </a:xfrm>
-            <a:prstGeom prst="rect">
-              <a:avLst/>
-            </a:prstGeom>
-            <a:noFill/>
-            <a:ln>
-              <a:noFill/>
-            </a:ln>
-          </p:spPr>
-          <p:txBody>
-            <a:bodyPr wrap="none" lIns="0" tIns="0" rIns="0" bIns="0" anchor="t" anchorCtr="0">
-              <a:spAutoFit/>
-            </a:bodyPr>
-            <a:lstStyle/>
-            <a:p>
-              <a:pPr algn="l"/>
-              <a:r>
-                <a:rPr lang="zh-CN" sz="980" dirty="0">
-                  <a:solidFill>
-                    <a:srgbClr val="A9B7CC"/>
-                  </a:solidFill>
-                  <a:latin typeface="+mn-lt"/>
-                  <a:ea typeface="+mn-ea"/>
-                  <a:cs typeface="+mn-cs"/>
-                </a:rPr>
-                <a:t>用管程，或限制同时拿筷子的人数。</a:t>
-              </a:r>
-              <a:endParaRPr lang="zh-CN" sz="980" dirty="0">
-                <a:solidFill>
-                  <a:srgbClr val="A9B7CC"/>
-                </a:solidFill>
-                <a:latin typeface="+mn-lt"/>
-                <a:ea typeface="+mn-ea"/>
-                <a:cs typeface="+mn-cs"/>
-              </a:endParaRPr>
+          <p:txBody>
+            <a:bodyPr/>
+            <a:p>
+              <a:endParaRPr lang="zh-CN" altLang="en-US"/>
             </a:p>
           </p:txBody>
         </p:sp>
@@ -10058,10 +9455,10 @@
         </p:nvGrpSpPr>
         <p:grpSpPr>
           <a:xfrm>
-            <a:off x="3815334" y="4878705"/>
-            <a:ext cx="7695628" cy="1547495"/>
-            <a:chOff x="3815334" y="4878705"/>
-            <a:chExt cx="7695628" cy="1547495"/>
+            <a:off x="3527044" y="3908425"/>
+            <a:ext cx="7983918" cy="2517775"/>
+            <a:chOff x="3527044" y="3908425"/>
+            <a:chExt cx="7983918" cy="2517775"/>
           </a:xfrm>
         </p:grpSpPr>
         <p:sp>
@@ -10072,7 +9469,7 @@
           </p:nvSpPr>
           <p:spPr>
             <a:xfrm>
-              <a:off x="3815334" y="4878705"/>
+              <a:off x="3527044" y="3908425"/>
               <a:ext cx="3804920" cy="710565"/>
             </a:xfrm>
             <a:prstGeom prst="rect">
@@ -24030,105 +23427,15 @@
 </p:tagLst>
 </file>
 
-<file path=ppt/tags/tag26.xml><?xml version="1.0" encoding="utf-8"?>
-<p:tagLst xmlns:p="http://schemas.openxmlformats.org/presentationml/2006/main">
-  <p:tag name="KSO_WM_DIAGRAM_VIRTUALLY_FRAME" val="{&quot;height&quot;:187.95,&quot;left&quot;:54,&quot;top&quot;:224.55,&quot;width&quot;:801}"/>
-</p:tagLst>
-</file>
-
-<file path=ppt/tags/tag27.xml><?xml version="1.0" encoding="utf-8"?>
-<p:tagLst xmlns:p="http://schemas.openxmlformats.org/presentationml/2006/main">
-  <p:tag name="KSO_WM_DIAGRAM_VIRTUALLY_FRAME" val="{&quot;height&quot;:187.95,&quot;left&quot;:54,&quot;top&quot;:224.55,&quot;width&quot;:801}"/>
-</p:tagLst>
-</file>
-
-<file path=ppt/tags/tag28.xml><?xml version="1.0" encoding="utf-8"?>
-<p:tagLst xmlns:p="http://schemas.openxmlformats.org/presentationml/2006/main">
-  <p:tag name="KSO_WM_DIAGRAM_VIRTUALLY_FRAME" val="{&quot;height&quot;:187.95,&quot;left&quot;:54,&quot;top&quot;:224.55,&quot;width&quot;:801}"/>
-</p:tagLst>
-</file>
-
-<file path=ppt/tags/tag29.xml><?xml version="1.0" encoding="utf-8"?>
-<p:tagLst xmlns:p="http://schemas.openxmlformats.org/presentationml/2006/main">
-  <p:tag name="KSO_WM_DIAGRAM_VIRTUALLY_FRAME" val="{&quot;height&quot;:187.95,&quot;left&quot;:54,&quot;top&quot;:224.55,&quot;width&quot;:801}"/>
-</p:tagLst>
-</file>
-
 <file path=ppt/tags/tag3.xml><?xml version="1.0" encoding="utf-8"?>
 <p:tagLst xmlns:p="http://schemas.openxmlformats.org/presentationml/2006/main">
   <p:tag name="KSO_WM_DIAGRAM_VIRTUALLY_FRAME" val="{&quot;height&quot;:136.30005052844726,&quot;left&quot;:54,&quot;top&quot;:225,&quot;width&quot;:840}"/>
 </p:tagLst>
 </file>
 
-<file path=ppt/tags/tag30.xml><?xml version="1.0" encoding="utf-8"?>
-<p:tagLst xmlns:p="http://schemas.openxmlformats.org/presentationml/2006/main">
-  <p:tag name="KSO_WM_DIAGRAM_VIRTUALLY_FRAME" val="{&quot;height&quot;:187.95,&quot;left&quot;:54,&quot;top&quot;:224.55,&quot;width&quot;:801}"/>
-</p:tagLst>
-</file>
-
-<file path=ppt/tags/tag31.xml><?xml version="1.0" encoding="utf-8"?>
-<p:tagLst xmlns:p="http://schemas.openxmlformats.org/presentationml/2006/main">
-  <p:tag name="KSO_WM_DIAGRAM_VIRTUALLY_FRAME" val="{&quot;height&quot;:187.95,&quot;left&quot;:54,&quot;top&quot;:224.55,&quot;width&quot;:801}"/>
-</p:tagLst>
-</file>
-
-<file path=ppt/tags/tag32.xml><?xml version="1.0" encoding="utf-8"?>
-<p:tagLst xmlns:p="http://schemas.openxmlformats.org/presentationml/2006/main">
-  <p:tag name="KSO_WM_DIAGRAM_VIRTUALLY_FRAME" val="{&quot;height&quot;:187.95,&quot;left&quot;:54,&quot;top&quot;:224.55,&quot;width&quot;:801}"/>
-</p:tagLst>
-</file>
-
-<file path=ppt/tags/tag33.xml><?xml version="1.0" encoding="utf-8"?>
-<p:tagLst xmlns:p="http://schemas.openxmlformats.org/presentationml/2006/main">
-  <p:tag name="KSO_WM_DIAGRAM_VIRTUALLY_FRAME" val="{&quot;height&quot;:187.95,&quot;left&quot;:54,&quot;top&quot;:224.55,&quot;width&quot;:801}"/>
-</p:tagLst>
-</file>
-
-<file path=ppt/tags/tag34.xml><?xml version="1.0" encoding="utf-8"?>
-<p:tagLst xmlns:p="http://schemas.openxmlformats.org/presentationml/2006/main">
-  <p:tag name="KSO_WM_DIAGRAM_VIRTUALLY_FRAME" val="{&quot;height&quot;:187.95,&quot;left&quot;:54,&quot;top&quot;:224.55,&quot;width&quot;:801}"/>
-</p:tagLst>
-</file>
-
-<file path=ppt/tags/tag35.xml><?xml version="1.0" encoding="utf-8"?>
-<p:tagLst xmlns:p="http://schemas.openxmlformats.org/presentationml/2006/main">
-  <p:tag name="KSO_WM_DIAGRAM_VIRTUALLY_FRAME" val="{&quot;height&quot;:187.95,&quot;left&quot;:54,&quot;top&quot;:224.55,&quot;width&quot;:801}"/>
-</p:tagLst>
-</file>
-
-<file path=ppt/tags/tag36.xml><?xml version="1.0" encoding="utf-8"?>
-<p:tagLst xmlns:p="http://schemas.openxmlformats.org/presentationml/2006/main">
-  <p:tag name="KSO_WM_DIAGRAM_VIRTUALLY_FRAME" val="{&quot;height&quot;:187.95,&quot;left&quot;:54,&quot;top&quot;:224.55,&quot;width&quot;:801}"/>
-</p:tagLst>
-</file>
-
-<file path=ppt/tags/tag37.xml><?xml version="1.0" encoding="utf-8"?>
-<p:tagLst xmlns:p="http://schemas.openxmlformats.org/presentationml/2006/main">
-  <p:tag name="KSO_WM_DIAGRAM_VIRTUALLY_FRAME" val="{&quot;height&quot;:187.95,&quot;left&quot;:54,&quot;top&quot;:224.55,&quot;width&quot;:801}"/>
-</p:tagLst>
-</file>
-
-<file path=ppt/tags/tag38.xml><?xml version="1.0" encoding="utf-8"?>
-<p:tagLst xmlns:p="http://schemas.openxmlformats.org/presentationml/2006/main">
-  <p:tag name="KSO_WM_DIAGRAM_VIRTUALLY_FRAME" val="{&quot;height&quot;:187.95,&quot;left&quot;:54,&quot;top&quot;:224.55,&quot;width&quot;:801}"/>
-</p:tagLst>
-</file>
-
-<file path=ppt/tags/tag39.xml><?xml version="1.0" encoding="utf-8"?>
-<p:tagLst xmlns:p="http://schemas.openxmlformats.org/presentationml/2006/main">
-  <p:tag name="KSO_WM_DIAGRAM_VIRTUALLY_FRAME" val="{&quot;height&quot;:187.95,&quot;left&quot;:54,&quot;top&quot;:224.55,&quot;width&quot;:801}"/>
-</p:tagLst>
-</file>
-
 <file path=ppt/tags/tag4.xml><?xml version="1.0" encoding="utf-8"?>
 <p:tagLst xmlns:p="http://schemas.openxmlformats.org/presentationml/2006/main">
   <p:tag name="KSO_WM_DIAGRAM_VIRTUALLY_FRAME" val="{&quot;height&quot;:136.30005052844726,&quot;left&quot;:54,&quot;top&quot;:225,&quot;width&quot;:840}"/>
-</p:tagLst>
-</file>
-
-<file path=ppt/tags/tag40.xml><?xml version="1.0" encoding="utf-8"?>
-<p:tagLst xmlns:p="http://schemas.openxmlformats.org/presentationml/2006/main">
-  <p:tag name="KSO_WM_DIAGRAM_VIRTUALLY_FRAME" val="{&quot;height&quot;:187.95,&quot;left&quot;:54,&quot;top&quot;:224.55,&quot;width&quot;:801}"/>
 </p:tagLst>
 </file>
 
